--- a/10-Knowledge-Products/KP1-GEA/videos/module_5/en/decks/KP1_M5_5.7_Deck_v0.1.pptx
+++ b/10-Knowledge-Products/KP1-GEA/videos/module_5/en/decks/KP1_M5_5.7_Deck_v0.1.pptx
@@ -1003,7 +1003,7 @@
           <a:lstStyle/>
           <a:p>
             <a:r>
-              <a:t>VO, slide 1: Every play in this topic produces a draft fast. This last part is about the discipline that keeps those drafts from becoming liabilities. Four safeguards. Skip them, and AI becomes a fast way to put wrong facts, fabricated sources, or leaked data into a government decision.</a:t>
+              <a:t>VO, slide 1: Every play in this module produces a draft fast. This last part is about the discipline that keeps those drafts from becoming liabilities. Four safeguards. Skip them, and AI becomes a fast way to put wrong facts, fabricated sources, or leaked data into a government decision.</a:t>
             </a:r>
           </a:p>
           <a:p/>
@@ -12613,7 +12613,7 @@
         <p:spPr>
           <a:xfrm>
             <a:off x="658368" y="1600200"/>
-            <a:ext cx="10881360" cy="2651760"/>
+            <a:ext cx="10881360" cy="1984248"/>
           </a:xfrm>
           <a:prstGeom prst="rect">
             <a:avLst/>
@@ -12667,7 +12667,7 @@
         </p:nvSpPr>
         <p:spPr>
           <a:xfrm>
-            <a:off x="658368" y="4434840"/>
+            <a:off x="658368" y="3767328"/>
             <a:ext cx="10881360" cy="1325880"/>
           </a:xfrm>
           <a:prstGeom prst="roundRect">
@@ -12713,7 +12713,7 @@
         </p:nvSpPr>
         <p:spPr>
           <a:xfrm>
-            <a:off x="859536" y="4626864"/>
+            <a:off x="859536" y="3959352"/>
             <a:ext cx="10479024" cy="1051560"/>
           </a:xfrm>
           <a:prstGeom prst="rect">
@@ -12883,7 +12883,7 @@
         <p:spPr>
           <a:xfrm>
             <a:off x="658368" y="1600200"/>
-            <a:ext cx="10881360" cy="2651760"/>
+            <a:ext cx="10881360" cy="1673352"/>
           </a:xfrm>
           <a:prstGeom prst="rect">
             <a:avLst/>
@@ -12937,7 +12937,7 @@
         </p:nvSpPr>
         <p:spPr>
           <a:xfrm>
-            <a:off x="658368" y="4434840"/>
+            <a:off x="658368" y="3456432"/>
             <a:ext cx="10881360" cy="1325880"/>
           </a:xfrm>
           <a:prstGeom prst="roundRect">
@@ -12983,7 +12983,7 @@
         </p:nvSpPr>
         <p:spPr>
           <a:xfrm>
-            <a:off x="859536" y="4626864"/>
+            <a:off x="859536" y="3648456"/>
             <a:ext cx="10479024" cy="1051560"/>
           </a:xfrm>
           <a:prstGeom prst="rect">
@@ -13669,7 +13669,7 @@
         <p:spPr>
           <a:xfrm>
             <a:off x="658368" y="1600200"/>
-            <a:ext cx="10881360" cy="2651760"/>
+            <a:ext cx="10881360" cy="1984248"/>
           </a:xfrm>
           <a:prstGeom prst="rect">
             <a:avLst/>
@@ -13723,7 +13723,7 @@
         </p:nvSpPr>
         <p:spPr>
           <a:xfrm>
-            <a:off x="658368" y="4434840"/>
+            <a:off x="658368" y="3767328"/>
             <a:ext cx="10881360" cy="1325880"/>
           </a:xfrm>
           <a:prstGeom prst="roundRect">
@@ -13769,7 +13769,7 @@
         </p:nvSpPr>
         <p:spPr>
           <a:xfrm>
-            <a:off x="859536" y="4626864"/>
+            <a:off x="859536" y="3959352"/>
             <a:ext cx="10479024" cy="1051560"/>
           </a:xfrm>
           <a:prstGeom prst="rect">

--- a/10-Knowledge-Products/KP1-GEA/videos/module_5/en/decks/KP1_M5_5.7_Deck_v0.1.pptx
+++ b/10-Knowledge-Products/KP1-GEA/videos/module_5/en/decks/KP1_M5_5.7_Deck_v0.1.pptx
@@ -1003,13 +1003,13 @@
           <a:lstStyle/>
           <a:p>
             <a:r>
-              <a:t>VO, slide 1: Every play in this module produces a draft fast. This last part is about the discipline that keeps those drafts from becoming liabilities. Four safeguards. Skip them, and AI becomes a fast way to put wrong facts, fabricated sources, or leaked data into a government decision.</a:t>
+              <a:t>VO, slide 1: Bring it all together into the case you carry into the room. After everything, it reduces to three sentences a minister can hold: this is proven, it is portable, and it is necessary now. And underneath those three sit the two reasons an Enterprise Architecture exists at all — the two ideas to leave with.</a:t>
             </a:r>
           </a:p>
           <a:p/>
           <a:p>
             <a:r>
-              <a:t>Production cue: the closing video of the module. Its AI usage tip is a meta-prompt — strip a prompt of sensitive data — and it ships in the description.</a:t>
+              <a:t>Production cue: the closing video of the module and of KP1. Its AI usage tip drafts the closing one-page case for the minister, and ships in the description.</a:t>
             </a:r>
           </a:p>
         </p:txBody>
@@ -1079,7 +1079,7 @@
           <a:lstStyle/>
           <a:p>
             <a:r>
-              <a:t>VO: First, verify. Every fact an AI states is a hypothesis until you check it against a real source — a document, a system, a named person. The plausible section number, the confident figure, the specific claim: each is exactly as convincing whether it is right or invented. This is not a small risk. A wrong reference in a deliverable, a made-up statistic in a cabinet briefing — these damage your credibility more than a gap in the work would. Verify before you forward. Always.</a:t>
+              <a:t>VO: The first two you can now say plainly. Proven — four very different governments have built the same pattern, with the successes and the failures both documented, so you adapt a charted path rather than invent one. Portable — the method is sector-agnostic, the same phases on a learner, a patient, a farmer, and each sector after the first costs less because the muscle is built once. Proven and portable. Those alone make a strong case. But the third is the one that makes it urgent.</a:t>
             </a:r>
           </a:p>
         </p:txBody>
@@ -1149,7 +1149,7 @@
           <a:lstStyle/>
           <a:p>
             <a:r>
-              <a:t>VO: Second, cite or discard — the rule from the comparator play, applied everywhere. Any claim about the outside world — what another country did, what a standard requires, what a benchmark shows — needs a real, checkable source. AI fabricates citations as fluently as it writes prose. So open the source. If it does not say what the AI claims, discard the claim, not just the citation. An unsourced claim you cannot verify is a liability you are choosing to carry into a meeting.</a:t>
+              <a:t>VO: Necessary now. For thirty years, digital government meant taking a paper process and putting it online — the form becomes a web form, the queue an appointment. That era is ending. The work that delivers real results today is different: redesigning how government serves citizens — once-only data sharing, a shared identity, a single record that follows a person across services. That work is not putting paper online. It is changing how the government operates. And it cannot be done by the IT department alone, or by the policy side alone.</a:t>
             </a:r>
           </a:p>
         </p:txBody>
@@ -1219,7 +1219,13 @@
           <a:lstStyle/>
           <a:p>
             <a:r>
-              <a:t>VO: Third, protect the data. Do not paste citizen personal data, security configurations, unpublished cabinet papers, or anything your data-protection act covers into a public AI tool. The plays never need it: you can run every one with placeholders — a learner, a powerful programme, country X — instead of real names and records. Your data-protection act applies to what you type into a chatbot exactly as it applies to any other system. Treat the prompt box as a public place, because it is.</a:t>
+              <a:t>VO: And here are the two reasons an EA exists, which are the two ideas to carry out of this whole knowledge product. First: re-use. Inside any project, building your own is cheaper than reusing — so projects fragment, and no procurement rule can change that. Only planning at the level of the whole government makes re-use rational, and only an EA gives you that view. Second: shared language. The new work needs the business side and the IT side to decide together, and they do not speak the same language. An EA gives them one — a shared picture, shared words, and a standing forum to decide in. Re-use and shared language. Everything else in this knowledge product serves those two.</a:t>
+            </a:r>
+          </a:p>
+          <a:p/>
+          <a:p>
+            <a:r>
+              <a:t>Production cue: the two ideas the whole knowledge product reduces to. Hold it a beat longer.</a:t>
             </a:r>
           </a:p>
         </p:txBody>
@@ -1289,7 +1295,7 @@
           <a:lstStyle/>
           <a:p>
             <a:r>
-              <a:t>VO: Fourth, keep the decision human. Across every play, the pattern holds: the AI prepares, the human decides. The Board rules on the gate paper. The architect defends the ranking. The legal counsel approves the terms of reference. The minister owns the roadmap. Accountability cannot be handed to a tool that has no stake in the outcome and cannot be questioned afterward. When something the AI drafted turns out wrong, the answer is never the AI said so — it is your name on the decision. Use AI to decide faster and better, never to avoid deciding.</a:t>
+              <a:t>VO: Which is why the third sentence is the urgent one. In the era of digitising paper, an Enterprise Architecture was useful — a nice-to-have that made things tidier. In the era of redesigning how government works, it is necessary — because without it, re-use does not happen and the business and IT sides cannot have the conversation the redesign requires. The countries delivering real results have understood this. The case you make is not that an EA would be a good idea. It is that the work your government is now being asked to do cannot be done well without one.</a:t>
             </a:r>
           </a:p>
           <a:p/>
@@ -1365,7 +1371,7 @@
           <a:lstStyle/>
           <a:p>
             <a:r>
-              <a:t>VO: So these are the safeguards that make the plays safe. Verify every fact. Cite or discard every claim. Protect the data. Keep the decision human. None of them slows you down much, and together they are the difference between AI that makes you faster and AI that makes you confidently, accountably wrong. Use the plays freely — inside these four rules.</a:t>
+              <a:t>VO: So that is the case, whole. Proven — four governments have done it. Portable — it works across your sectors and compounds. Necessary now — because the new work of government cannot be done without it. And underneath, the two reasons it exists: re-use, and a shared language between business and IT. Carry those into the room. That is the case for a national Enterprise Architecture — and the case for starting it where you are, now.</a:t>
             </a:r>
           </a:p>
         </p:txBody>
@@ -11710,7 +11716,7 @@
                 </a:solidFill>
                 <a:latin typeface="Arial"/>
               </a:rPr>
-              <a:t>5.7 — Keep AI honest — verify, cite, and protect data</a:t>
+              <a:t>5.7 — The closing case — proven, portable, and necessary now</a:t>
             </a:r>
           </a:p>
         </p:txBody>
@@ -11826,7 +11832,7 @@
                 </a:solidFill>
                 <a:latin typeface="Arial"/>
               </a:rPr>
-              <a:t>The safeguards that make every play safe: verify each output against a named source, cite or discard, never paste confidential or personal data, and keep the decision human — the difference between AI that helps and AI that quietly harms.</a:t>
+              <a:t>The case for a national EA comes down to three things you can now say with confidence — it is proven, it is portable, and in the era of redesigning how government works it is no longer optional but necessary — held together by the two reasons an EA exists: it makes re-use possible, and it gives business and IT a shared language.</a:t>
             </a:r>
           </a:p>
         </p:txBody>
@@ -11923,7 +11929,7 @@
                 </a:solidFill>
                 <a:latin typeface="Arial"/>
               </a:rPr>
-              <a:t>Chief architect · senior architect · sector ICT lead</a:t>
+              <a:t>Director-general · head of a sectoral ICT unit · technical secretary</a:t>
             </a:r>
           </a:p>
         </p:txBody>
@@ -12001,7 +12007,7 @@
                 </a:solidFill>
                 <a:latin typeface="Arial"/>
               </a:rPr>
-              <a:t>THE FIVE PLAYS THIS MODULE TEACHES</a:t>
+              <a:t>THE CASE YOU CARRY INTO THE ROOM</a:t>
             </a:r>
           </a:p>
         </p:txBody>
@@ -12056,7 +12062,7 @@
                 </a:solidFill>
                 <a:latin typeface="Arial"/>
               </a:rPr>
-              <a:t>Play 1 — Discovery and Assess</a:t>
+              <a:t>Proven — four real governments</a:t>
             </a:r>
           </a:p>
         </p:txBody>
@@ -12111,7 +12117,7 @@
                 </a:solidFill>
                 <a:latin typeface="Arial"/>
               </a:rPr>
-              <a:t>Play 2 — the re-use business case</a:t>
+              <a:t>Portable — sector after sector</a:t>
             </a:r>
           </a:p>
         </p:txBody>
@@ -12166,7 +12172,7 @@
                 </a:solidFill>
                 <a:latin typeface="Arial"/>
               </a:rPr>
-              <a:t>Play 3 — minister and architects</a:t>
+              <a:t>The commitment — the one page</a:t>
             </a:r>
           </a:p>
         </p:txBody>
@@ -12221,7 +12227,7 @@
                 </a:solidFill>
                 <a:latin typeface="Arial"/>
               </a:rPr>
-              <a:t>Play 4 — the governance artefacts</a:t>
+              <a:t>The capability — your own people</a:t>
             </a:r>
           </a:p>
         </p:txBody>
@@ -12276,7 +12282,7 @@
                 </a:solidFill>
                 <a:latin typeface="Arial"/>
               </a:rPr>
-              <a:t>Play 5 — comparators and transfer</a:t>
+              <a:t>Necessary now, not just useful</a:t>
             </a:r>
           </a:p>
         </p:txBody>
@@ -12310,7 +12316,7 @@
                 </a:solidFill>
                 <a:latin typeface="Arial"/>
               </a:rPr>
-              <a:t>4-part prompt · 5 plays · 4 safeguards · you decide, the AI drafts</a:t>
+              <a:t>4 governments · 4 killers to design out · 1 page for the minister</a:t>
             </a:r>
           </a:p>
         </p:txBody>
@@ -12435,7 +12441,7 @@
                 </a:solidFill>
                 <a:latin typeface="Arial"/>
               </a:rPr>
-              <a:t>Keep AI honest — verify, cite, and protect data</a:t>
+              <a:t>The closing case — proven, portable, and necessary now</a:t>
             </a:r>
           </a:p>
         </p:txBody>
@@ -12469,7 +12475,7 @@
                 </a:solidFill>
                 <a:latin typeface="Arial"/>
               </a:rPr>
-              <a:t>The safeguards that make every play safe: verify each output against a named source, cite or discard, never paste confidential or personal data, and keep the decision human — the difference between AI that helps and AI that quietly harms.</a:t>
+              <a:t>The case for a national EA comes down to three things you can now say with confidence — it is proven, it is portable, and in the era of redesigning how government works it is no longer optional but necessary — held together by the two reasons an EA exists: it makes re-use possible, and it gives business and IT a shared language.</a:t>
             </a:r>
           </a:p>
         </p:txBody>
@@ -12599,76 +12605,21 @@
                 </a:solidFill>
                 <a:latin typeface="Arial"/>
               </a:rPr>
-              <a:t>Every fact the AI states is a hypothesis until you check it</a:t>
+              <a:t>Proven and portable — the first two you can now say plainly</a:t>
             </a:r>
           </a:p>
         </p:txBody>
       </p:sp>
       <p:sp>
         <p:nvSpPr>
-          <p:cNvPr id="4" name="TextBox 3"/>
-          <p:cNvSpPr txBox="1"/>
-          <p:nvPr/>
-        </p:nvSpPr>
-        <p:spPr>
-          <a:xfrm>
-            <a:off x="658368" y="1600200"/>
-            <a:ext cx="10881360" cy="1984248"/>
-          </a:xfrm>
-          <a:prstGeom prst="rect">
-            <a:avLst/>
-          </a:prstGeom>
-          <a:noFill/>
-        </p:spPr>
-        <p:txBody>
-          <a:bodyPr wrap="square">
-            <a:spAutoFit/>
-          </a:bodyPr>
-          <a:lstStyle/>
-          <a:p>
-            <a:pPr>
-              <a:spcAft>
-                <a:spcPts val="1200"/>
-              </a:spcAft>
-            </a:pPr>
-            <a:r>
-              <a:rPr sz="2000" b="0" i="0">
-                <a:solidFill>
-                  <a:srgbClr val="1A1A1A"/>
-                </a:solidFill>
-                <a:latin typeface="Arial"/>
-              </a:rPr>
-              <a:t>Check it against a real source — a document, a system, a named person. The plausible section number, the confident figure, the specific claim: each is exactly as convincing whether it is right or invented.</a:t>
-            </a:r>
-          </a:p>
-          <a:p>
-            <a:pPr>
-              <a:spcAft>
-                <a:spcPts val="1200"/>
-              </a:spcAft>
-            </a:pPr>
-            <a:r>
-              <a:rPr sz="2000" b="0" i="0">
-                <a:solidFill>
-                  <a:srgbClr val="1A1A1A"/>
-                </a:solidFill>
-                <a:latin typeface="Arial"/>
-              </a:rPr>
-              <a:t>A wrong reference in a deliverable, or a made-up statistic in a cabinet briefing, damages your credibility more than a gap in the work would.</a:t>
-            </a:r>
-          </a:p>
-        </p:txBody>
-      </p:sp>
-      <p:sp>
-        <p:nvSpPr>
-          <p:cNvPr id="5" name="Rounded Rectangle 4"/>
+          <p:cNvPr id="4" name="Rounded Rectangle 3"/>
           <p:cNvSpPr/>
           <p:nvPr/>
         </p:nvSpPr>
         <p:spPr>
           <a:xfrm>
-            <a:off x="658368" y="3767328"/>
-            <a:ext cx="10881360" cy="1325880"/>
+            <a:off x="658368" y="1554480"/>
+            <a:ext cx="5394960" cy="3977639"/>
           </a:xfrm>
           <a:prstGeom prst="roundRect">
             <a:avLst>
@@ -12707,14 +12658,14 @@
       </p:sp>
       <p:sp>
         <p:nvSpPr>
-          <p:cNvPr id="6" name="TextBox 5"/>
+          <p:cNvPr id="5" name="TextBox 4"/>
           <p:cNvSpPr txBox="1"/>
           <p:nvPr/>
         </p:nvSpPr>
         <p:spPr>
           <a:xfrm>
-            <a:off x="859536" y="3959352"/>
-            <a:ext cx="10479024" cy="1051560"/>
+            <a:off x="859536" y="1700784"/>
+            <a:ext cx="4992624" cy="3703320"/>
           </a:xfrm>
           <a:prstGeom prst="rect">
             <a:avLst/>
@@ -12733,20 +12684,235 @@
               </a:spcAft>
             </a:pPr>
             <a:r>
-              <a:rPr sz="2300" b="1" i="0">
+              <a:rPr sz="1900" b="1" i="0">
                 <a:solidFill>
                   <a:srgbClr val="006E96"/>
                 </a:solidFill>
                 <a:latin typeface="Arial"/>
               </a:rPr>
-              <a:t>Verify before you forward. Always.</a:t>
+              <a:t>PROVEN</a:t>
+            </a:r>
+          </a:p>
+          <a:p>
+            <a:pPr>
+              <a:spcAft>
+                <a:spcPts val="700"/>
+              </a:spcAft>
+            </a:pPr>
+            <a:r>
+              <a:rPr sz="1600" b="0" i="0">
+                <a:solidFill>
+                  <a:srgbClr val="1A1A1A"/>
+                </a:solidFill>
+                <a:latin typeface="Arial"/>
+              </a:rPr>
+              <a:t>Four very different governments built the same pattern.</a:t>
+            </a:r>
+          </a:p>
+          <a:p>
+            <a:pPr>
+              <a:spcAft>
+                <a:spcPts val="700"/>
+              </a:spcAft>
+            </a:pPr>
+            <a:r>
+              <a:rPr sz="1600" b="0" i="0">
+                <a:solidFill>
+                  <a:srgbClr val="1A1A1A"/>
+                </a:solidFill>
+                <a:latin typeface="Arial"/>
+              </a:rPr>
+              <a:t>Successes and failures both documented.</a:t>
+            </a:r>
+          </a:p>
+          <a:p>
+            <a:pPr>
+              <a:spcAft>
+                <a:spcPts val="700"/>
+              </a:spcAft>
+            </a:pPr>
+            <a:r>
+              <a:rPr sz="1600" b="0" i="0">
+                <a:solidFill>
+                  <a:srgbClr val="1A1A1A"/>
+                </a:solidFill>
+                <a:latin typeface="Arial"/>
+              </a:rPr>
+              <a:t>You adapt a charted path rather than invent one.</a:t>
             </a:r>
           </a:p>
         </p:txBody>
       </p:sp>
       <p:sp>
         <p:nvSpPr>
+          <p:cNvPr id="6" name="Rounded Rectangle 5"/>
+          <p:cNvSpPr/>
+          <p:nvPr/>
+        </p:nvSpPr>
+        <p:spPr>
+          <a:xfrm>
+            <a:off x="6263640" y="1554480"/>
+            <a:ext cx="5394960" cy="3977639"/>
+          </a:xfrm>
+          <a:prstGeom prst="roundRect">
+            <a:avLst>
+              <a:gd name="adj" fmla="val 4500"/>
+            </a:avLst>
+          </a:prstGeom>
+          <a:solidFill>
+            <a:srgbClr val="F2F2F2"/>
+          </a:solidFill>
+          <a:ln>
+            <a:noFill/>
+          </a:ln>
+          <a:effectLst/>
+        </p:spPr>
+        <p:style>
+          <a:lnRef idx="1">
+            <a:schemeClr val="accent1"/>
+          </a:lnRef>
+          <a:fillRef idx="3">
+            <a:schemeClr val="accent1"/>
+          </a:fillRef>
+          <a:effectRef idx="2">
+            <a:schemeClr val="accent1"/>
+          </a:effectRef>
+          <a:fontRef idx="minor">
+            <a:schemeClr val="lt1"/>
+          </a:fontRef>
+        </p:style>
+        <p:txBody>
+          <a:bodyPr rtlCol="0" anchor="ctr"/>
+          <a:lstStyle/>
+          <a:p>
+            <a:pPr algn="ctr"/>
+          </a:p>
+        </p:txBody>
+      </p:sp>
+      <p:sp>
+        <p:nvSpPr>
           <p:cNvPr id="7" name="TextBox 6"/>
+          <p:cNvSpPr txBox="1"/>
+          <p:nvPr/>
+        </p:nvSpPr>
+        <p:spPr>
+          <a:xfrm>
+            <a:off x="6464808" y="1700784"/>
+            <a:ext cx="4992624" cy="3703320"/>
+          </a:xfrm>
+          <a:prstGeom prst="rect">
+            <a:avLst/>
+          </a:prstGeom>
+          <a:noFill/>
+        </p:spPr>
+        <p:txBody>
+          <a:bodyPr wrap="square">
+            <a:spAutoFit/>
+          </a:bodyPr>
+          <a:lstStyle/>
+          <a:p>
+            <a:pPr>
+              <a:spcAft>
+                <a:spcPts val="700"/>
+              </a:spcAft>
+            </a:pPr>
+            <a:r>
+              <a:rPr sz="1900" b="1" i="0">
+                <a:solidFill>
+                  <a:srgbClr val="006E96"/>
+                </a:solidFill>
+                <a:latin typeface="Arial"/>
+              </a:rPr>
+              <a:t>PORTABLE</a:t>
+            </a:r>
+          </a:p>
+          <a:p>
+            <a:pPr>
+              <a:spcAft>
+                <a:spcPts val="700"/>
+              </a:spcAft>
+            </a:pPr>
+            <a:r>
+              <a:rPr sz="1600" b="0" i="0">
+                <a:solidFill>
+                  <a:srgbClr val="1A1A1A"/>
+                </a:solidFill>
+                <a:latin typeface="Arial"/>
+              </a:rPr>
+              <a:t>The method is sector-agnostic.</a:t>
+            </a:r>
+          </a:p>
+          <a:p>
+            <a:pPr>
+              <a:spcAft>
+                <a:spcPts val="700"/>
+              </a:spcAft>
+            </a:pPr>
+            <a:r>
+              <a:rPr sz="1600" b="0" i="0">
+                <a:solidFill>
+                  <a:srgbClr val="1A1A1A"/>
+                </a:solidFill>
+                <a:latin typeface="Arial"/>
+              </a:rPr>
+              <a:t>The same phases on a learner, a patient, a farmer.</a:t>
+            </a:r>
+          </a:p>
+          <a:p>
+            <a:pPr>
+              <a:spcAft>
+                <a:spcPts val="700"/>
+              </a:spcAft>
+            </a:pPr>
+            <a:r>
+              <a:rPr sz="1600" b="0" i="0">
+                <a:solidFill>
+                  <a:srgbClr val="1A1A1A"/>
+                </a:solidFill>
+                <a:latin typeface="Arial"/>
+              </a:rPr>
+              <a:t>Each sector after the first costs less.</a:t>
+            </a:r>
+          </a:p>
+        </p:txBody>
+      </p:sp>
+      <p:sp>
+        <p:nvSpPr>
+          <p:cNvPr id="8" name="TextBox 7"/>
+          <p:cNvSpPr txBox="1"/>
+          <p:nvPr/>
+        </p:nvSpPr>
+        <p:spPr>
+          <a:xfrm>
+            <a:off x="658368" y="5715000"/>
+            <a:ext cx="10881360" cy="548640"/>
+          </a:xfrm>
+          <a:prstGeom prst="rect">
+            <a:avLst/>
+          </a:prstGeom>
+          <a:noFill/>
+        </p:spPr>
+        <p:txBody>
+          <a:bodyPr wrap="square">
+            <a:spAutoFit/>
+          </a:bodyPr>
+          <a:lstStyle/>
+          <a:p>
+            <a:r>
+              <a:rPr sz="1550" b="1" i="0">
+                <a:solidFill>
+                  <a:srgbClr val="006E96"/>
+                </a:solidFill>
+                <a:latin typeface="Arial"/>
+              </a:rPr>
+              <a:t>Those two alone make a strong case. The third is what makes it urgent.</a:t>
+            </a:r>
+          </a:p>
+        </p:txBody>
+      </p:sp>
+      <p:sp>
+        <p:nvSpPr>
+          <p:cNvPr id="9" name="TextBox 8"/>
           <p:cNvSpPr txBox="1"/>
           <p:nvPr/>
         </p:nvSpPr>
@@ -12773,7 +12939,7 @@
                 </a:solidFill>
                 <a:latin typeface="Arial"/>
               </a:rPr>
-              <a:t>5.7 · Keep AI honest — verify, cite, and protect data</a:t>
+              <a:t>5.7 · The closing case — proven, portable, and necessary now</a:t>
             </a:r>
           </a:p>
         </p:txBody>
@@ -12869,7 +13035,7 @@
                 </a:solidFill>
                 <a:latin typeface="Arial"/>
               </a:rPr>
-              <a:t>AI fabricates citations as fluently as it writes prose</a:t>
+              <a:t>For thirty years, digital government meant putting paper online. That era is ending</a:t>
             </a:r>
           </a:p>
         </p:txBody>
@@ -12883,7 +13049,7 @@
         <p:spPr>
           <a:xfrm>
             <a:off x="658368" y="1600200"/>
-            <a:ext cx="10881360" cy="1673352"/>
+            <a:ext cx="10881360" cy="2651760"/>
           </a:xfrm>
           <a:prstGeom prst="rect">
             <a:avLst/>
@@ -12908,7 +13074,7 @@
                 </a:solidFill>
                 <a:latin typeface="Arial"/>
               </a:rPr>
-              <a:t>Any claim about the outside world — what another country did, what a standard requires, what a benchmark shows — needs a real, checkable source.</a:t>
+              <a:t>The form became a web form, the queue an appointment. The work that delivers real results today is different: once-only data sharing, a shared identity, a single record that follows a person across services.</a:t>
             </a:r>
           </a:p>
           <a:p>
@@ -12924,7 +13090,7 @@
                 </a:solidFill>
                 <a:latin typeface="Arial"/>
               </a:rPr>
-              <a:t>So open the source. If it does not say what the AI claims, discard the claim, not just the citation.</a:t>
+              <a:t>That work is not putting paper online. It is changing how the government operates.</a:t>
             </a:r>
           </a:p>
         </p:txBody>
@@ -12937,7 +13103,7 @@
         </p:nvSpPr>
         <p:spPr>
           <a:xfrm>
-            <a:off x="658368" y="3456432"/>
+            <a:off x="658368" y="4434840"/>
             <a:ext cx="10881360" cy="1325880"/>
           </a:xfrm>
           <a:prstGeom prst="roundRect">
@@ -12983,7 +13149,7 @@
         </p:nvSpPr>
         <p:spPr>
           <a:xfrm>
-            <a:off x="859536" y="3648456"/>
+            <a:off x="859536" y="4626864"/>
             <a:ext cx="10479024" cy="1051560"/>
           </a:xfrm>
           <a:prstGeom prst="rect">
@@ -13009,7 +13175,7 @@
                 </a:solidFill>
                 <a:latin typeface="Arial"/>
               </a:rPr>
-              <a:t>An unsourced claim you cannot verify is a liability you choose to carry into the room.</a:t>
+              <a:t>And it cannot be done by the IT department alone, or the policy side alone.</a:t>
             </a:r>
           </a:p>
         </p:txBody>
@@ -13043,7 +13209,7 @@
                 </a:solidFill>
                 <a:latin typeface="Arial"/>
               </a:rPr>
-              <a:t>5.7 · Keep AI honest — verify, cite, and protect data</a:t>
+              <a:t>5.7 · The closing case — proven, portable, and necessary now</a:t>
             </a:r>
           </a:p>
         </p:txBody>
@@ -13139,82 +13305,29 @@
                 </a:solidFill>
                 <a:latin typeface="Arial"/>
               </a:rPr>
-              <a:t>Treat the prompt box as a public place, because it is</a:t>
+              <a:t>The two reasons an Enterprise Architecture exists</a:t>
             </a:r>
           </a:p>
         </p:txBody>
       </p:sp>
       <p:sp>
         <p:nvSpPr>
-          <p:cNvPr id="4" name="TextBox 3"/>
-          <p:cNvSpPr txBox="1"/>
-          <p:nvPr/>
-        </p:nvSpPr>
-        <p:spPr>
-          <a:xfrm>
-            <a:off x="658368" y="1463040"/>
-            <a:ext cx="10984687" cy="1028699"/>
-          </a:xfrm>
-          <a:prstGeom prst="rect">
-            <a:avLst/>
-          </a:prstGeom>
-          <a:noFill/>
-        </p:spPr>
-        <p:txBody>
-          <a:bodyPr wrap="square">
-            <a:spAutoFit/>
-          </a:bodyPr>
-          <a:lstStyle/>
-          <a:p>
-            <a:pPr>
-              <a:spcAft>
-                <a:spcPts val="300"/>
-              </a:spcAft>
-            </a:pPr>
-            <a:r>
-              <a:rPr sz="1900" b="1" i="0">
-                <a:solidFill>
-                  <a:srgbClr val="1A1A1A"/>
-                </a:solidFill>
-                <a:latin typeface="Arial"/>
-              </a:rPr>
-              <a:t>Citizen personal data</a:t>
-            </a:r>
-          </a:p>
-          <a:p>
-            <a:pPr>
-              <a:spcAft>
-                <a:spcPts val="300"/>
-              </a:spcAft>
-            </a:pPr>
-            <a:r>
-              <a:rPr sz="1550" b="0" i="0">
-                <a:solidFill>
-                  <a:srgbClr val="595959"/>
-                </a:solidFill>
-                <a:latin typeface="Arial"/>
-              </a:rPr>
-              <a:t>Names, records, anything identifying a real person.</a:t>
-            </a:r>
-          </a:p>
-        </p:txBody>
-      </p:sp>
-      <p:sp>
-        <p:nvSpPr>
-          <p:cNvPr id="5" name="Rectangle 4"/>
+          <p:cNvPr id="4" name="Rounded Rectangle 3"/>
           <p:cNvSpPr/>
           <p:nvPr/>
         </p:nvSpPr>
         <p:spPr>
           <a:xfrm>
-            <a:off x="621792" y="2496312"/>
-            <a:ext cx="10881360" cy="12700"/>
-          </a:xfrm>
-          <a:prstGeom prst="rect">
-            <a:avLst/>
+            <a:off x="658368" y="1554480"/>
+            <a:ext cx="5394960" cy="3977639"/>
+          </a:xfrm>
+          <a:prstGeom prst="roundRect">
+            <a:avLst>
+              <a:gd name="adj" fmla="val 4500"/>
+            </a:avLst>
           </a:prstGeom>
           <a:solidFill>
-            <a:srgbClr val="DDECF4"/>
+            <a:srgbClr val="E5F5FB"/>
           </a:solidFill>
           <a:ln>
             <a:noFill/>
@@ -13245,14 +13358,14 @@
       </p:sp>
       <p:sp>
         <p:nvSpPr>
-          <p:cNvPr id="6" name="TextBox 5"/>
+          <p:cNvPr id="5" name="TextBox 4"/>
           <p:cNvSpPr txBox="1"/>
           <p:nvPr/>
         </p:nvSpPr>
         <p:spPr>
           <a:xfrm>
-            <a:off x="658368" y="2537460"/>
-            <a:ext cx="10984687" cy="1028699"/>
+            <a:off x="859536" y="1700784"/>
+            <a:ext cx="4992624" cy="3703320"/>
           </a:xfrm>
           <a:prstGeom prst="rect">
             <a:avLst/>
@@ -13267,53 +13380,87 @@
           <a:p>
             <a:pPr>
               <a:spcAft>
-                <a:spcPts val="300"/>
+                <a:spcPts val="700"/>
               </a:spcAft>
             </a:pPr>
             <a:r>
               <a:rPr sz="1900" b="1" i="0">
+                <a:solidFill>
+                  <a:srgbClr val="006E96"/>
+                </a:solidFill>
+                <a:latin typeface="Arial"/>
+              </a:rPr>
+              <a:t>RE-USE</a:t>
+            </a:r>
+          </a:p>
+          <a:p>
+            <a:pPr>
+              <a:spcAft>
+                <a:spcPts val="700"/>
+              </a:spcAft>
+            </a:pPr>
+            <a:r>
+              <a:rPr sz="1600" b="0" i="0">
                 <a:solidFill>
                   <a:srgbClr val="1A1A1A"/>
                 </a:solidFill>
                 <a:latin typeface="Arial"/>
               </a:rPr>
-              <a:t>Security configurations</a:t>
+              <a:t>Inside any project, building your own is cheaper than reusing — so projects fragment.</a:t>
             </a:r>
           </a:p>
           <a:p>
             <a:pPr>
               <a:spcAft>
-                <a:spcPts val="300"/>
+                <a:spcPts val="700"/>
               </a:spcAft>
             </a:pPr>
             <a:r>
-              <a:rPr sz="1550" b="0" i="0">
+              <a:rPr sz="1600" b="0" i="0">
                 <a:solidFill>
-                  <a:srgbClr val="595959"/>
+                  <a:srgbClr val="1A1A1A"/>
                 </a:solidFill>
                 <a:latin typeface="Arial"/>
               </a:rPr>
-              <a:t>How your systems are protected.</a:t>
+              <a:t>No procurement rule can change that.</a:t>
+            </a:r>
+          </a:p>
+          <a:p>
+            <a:pPr>
+              <a:spcAft>
+                <a:spcPts val="700"/>
+              </a:spcAft>
+            </a:pPr>
+            <a:r>
+              <a:rPr sz="1600" b="0" i="0">
+                <a:solidFill>
+                  <a:srgbClr val="1A1A1A"/>
+                </a:solidFill>
+                <a:latin typeface="Arial"/>
+              </a:rPr>
+              <a:t>Only whole-of-government planning makes re-use rational, and only an EA gives that view.</a:t>
             </a:r>
           </a:p>
         </p:txBody>
       </p:sp>
       <p:sp>
         <p:nvSpPr>
-          <p:cNvPr id="7" name="Rectangle 6"/>
+          <p:cNvPr id="6" name="Rounded Rectangle 5"/>
           <p:cNvSpPr/>
           <p:nvPr/>
         </p:nvSpPr>
         <p:spPr>
           <a:xfrm>
-            <a:off x="621792" y="3570732"/>
-            <a:ext cx="10881360" cy="12700"/>
-          </a:xfrm>
-          <a:prstGeom prst="rect">
-            <a:avLst/>
+            <a:off x="6263640" y="1554480"/>
+            <a:ext cx="5394960" cy="3977639"/>
+          </a:xfrm>
+          <a:prstGeom prst="roundRect">
+            <a:avLst>
+              <a:gd name="adj" fmla="val 4500"/>
+            </a:avLst>
           </a:prstGeom>
           <a:solidFill>
-            <a:srgbClr val="DDECF4"/>
+            <a:srgbClr val="F2F2F2"/>
           </a:solidFill>
           <a:ln>
             <a:noFill/>
@@ -13344,14 +13491,14 @@
       </p:sp>
       <p:sp>
         <p:nvSpPr>
-          <p:cNvPr id="8" name="TextBox 7"/>
+          <p:cNvPr id="7" name="TextBox 6"/>
           <p:cNvSpPr txBox="1"/>
           <p:nvPr/>
         </p:nvSpPr>
         <p:spPr>
           <a:xfrm>
-            <a:off x="658368" y="3611879"/>
-            <a:ext cx="10984687" cy="1028699"/>
+            <a:off x="6464808" y="1700784"/>
+            <a:ext cx="4992624" cy="3703320"/>
           </a:xfrm>
           <a:prstGeom prst="rect">
             <a:avLst/>
@@ -13366,145 +13513,78 @@
           <a:p>
             <a:pPr>
               <a:spcAft>
-                <a:spcPts val="300"/>
+                <a:spcPts val="700"/>
               </a:spcAft>
             </a:pPr>
             <a:r>
               <a:rPr sz="1900" b="1" i="0">
+                <a:solidFill>
+                  <a:srgbClr val="006E96"/>
+                </a:solidFill>
+                <a:latin typeface="Arial"/>
+              </a:rPr>
+              <a:t>SHARED LANGUAGE</a:t>
+            </a:r>
+          </a:p>
+          <a:p>
+            <a:pPr>
+              <a:spcAft>
+                <a:spcPts val="700"/>
+              </a:spcAft>
+            </a:pPr>
+            <a:r>
+              <a:rPr sz="1600" b="0" i="0">
                 <a:solidFill>
                   <a:srgbClr val="1A1A1A"/>
                 </a:solidFill>
                 <a:latin typeface="Arial"/>
               </a:rPr>
-              <a:t>Unpublished cabinet papers</a:t>
+              <a:t>The new work needs the business side and the IT side to decide together.</a:t>
             </a:r>
           </a:p>
           <a:p>
             <a:pPr>
               <a:spcAft>
-                <a:spcPts val="300"/>
+                <a:spcPts val="700"/>
               </a:spcAft>
             </a:pPr>
             <a:r>
-              <a:rPr sz="1550" b="0" i="0">
-                <a:solidFill>
-                  <a:srgbClr val="595959"/>
-                </a:solidFill>
-                <a:latin typeface="Arial"/>
-              </a:rPr>
-              <a:t>Anything not yet public.</a:t>
-            </a:r>
-          </a:p>
-        </p:txBody>
-      </p:sp>
-      <p:sp>
-        <p:nvSpPr>
-          <p:cNvPr id="9" name="Rectangle 8"/>
-          <p:cNvSpPr/>
-          <p:nvPr/>
-        </p:nvSpPr>
-        <p:spPr>
-          <a:xfrm>
-            <a:off x="621792" y="4645152"/>
-            <a:ext cx="10881360" cy="12700"/>
-          </a:xfrm>
-          <a:prstGeom prst="rect">
-            <a:avLst/>
-          </a:prstGeom>
-          <a:solidFill>
-            <a:srgbClr val="DDECF4"/>
-          </a:solidFill>
-          <a:ln>
-            <a:noFill/>
-          </a:ln>
-          <a:effectLst/>
-        </p:spPr>
-        <p:style>
-          <a:lnRef idx="1">
-            <a:schemeClr val="accent1"/>
-          </a:lnRef>
-          <a:fillRef idx="3">
-            <a:schemeClr val="accent1"/>
-          </a:fillRef>
-          <a:effectRef idx="2">
-            <a:schemeClr val="accent1"/>
-          </a:effectRef>
-          <a:fontRef idx="minor">
-            <a:schemeClr val="lt1"/>
-          </a:fontRef>
-        </p:style>
-        <p:txBody>
-          <a:bodyPr rtlCol="0" anchor="ctr"/>
-          <a:lstStyle/>
-          <a:p>
-            <a:pPr algn="ctr"/>
-          </a:p>
-        </p:txBody>
-      </p:sp>
-      <p:sp>
-        <p:nvSpPr>
-          <p:cNvPr id="10" name="TextBox 9"/>
-          <p:cNvSpPr txBox="1"/>
-          <p:nvPr/>
-        </p:nvSpPr>
-        <p:spPr>
-          <a:xfrm>
-            <a:off x="658368" y="4686300"/>
-            <a:ext cx="10984687" cy="1028699"/>
-          </a:xfrm>
-          <a:prstGeom prst="rect">
-            <a:avLst/>
-          </a:prstGeom>
-          <a:noFill/>
-        </p:spPr>
-        <p:txBody>
-          <a:bodyPr wrap="square">
-            <a:spAutoFit/>
-          </a:bodyPr>
-          <a:lstStyle/>
-          <a:p>
-            <a:pPr>
-              <a:spcAft>
-                <a:spcPts val="300"/>
-              </a:spcAft>
-            </a:pPr>
-            <a:r>
-              <a:rPr sz="1900" b="1" i="0">
+              <a:rPr sz="1600" b="0" i="0">
                 <a:solidFill>
                   <a:srgbClr val="1A1A1A"/>
                 </a:solidFill>
                 <a:latin typeface="Arial"/>
               </a:rPr>
-              <a:t>Anything your data-protection act covers</a:t>
+              <a:t>They do not speak the same language.</a:t>
             </a:r>
           </a:p>
           <a:p>
             <a:pPr>
               <a:spcAft>
-                <a:spcPts val="300"/>
+                <a:spcPts val="700"/>
               </a:spcAft>
             </a:pPr>
             <a:r>
-              <a:rPr sz="1550" b="0" i="0">
+              <a:rPr sz="1600" b="0" i="0">
                 <a:solidFill>
-                  <a:srgbClr val="595959"/>
+                  <a:srgbClr val="1A1A1A"/>
                 </a:solidFill>
                 <a:latin typeface="Arial"/>
               </a:rPr>
-              <a:t>The act applies to what you type into a chatbot as it does to any other system.</a:t>
+              <a:t>An EA gives them a shared picture, shared words, and a forum to decide in.</a:t>
             </a:r>
           </a:p>
         </p:txBody>
       </p:sp>
       <p:sp>
         <p:nvSpPr>
-          <p:cNvPr id="11" name="TextBox 10"/>
+          <p:cNvPr id="8" name="TextBox 7"/>
           <p:cNvSpPr txBox="1"/>
           <p:nvPr/>
         </p:nvSpPr>
         <p:spPr>
           <a:xfrm>
-            <a:off x="658368" y="5870448"/>
+            <a:off x="658368" y="5715000"/>
             <a:ext cx="10881360" cy="548640"/>
           </a:xfrm>
           <a:prstGeom prst="rect">
@@ -13525,14 +13605,14 @@
                 </a:solidFill>
                 <a:latin typeface="Arial"/>
               </a:rPr>
-              <a:t>The plays never need it — run every one with placeholders: "a learner", "country X".</a:t>
+              <a:t>Everything else in this knowledge product serves those two.</a:t>
             </a:r>
           </a:p>
         </p:txBody>
       </p:sp>
       <p:sp>
         <p:nvSpPr>
-          <p:cNvPr id="12" name="TextBox 11"/>
+          <p:cNvPr id="9" name="TextBox 8"/>
           <p:cNvSpPr txBox="1"/>
           <p:nvPr/>
         </p:nvSpPr>
@@ -13559,7 +13639,7 @@
                 </a:solidFill>
                 <a:latin typeface="Arial"/>
               </a:rPr>
-              <a:t>5.7 · Keep AI honest — verify, cite, and protect data</a:t>
+              <a:t>5.7 · The closing case — proven, portable, and necessary now</a:t>
             </a:r>
           </a:p>
         </p:txBody>
@@ -13655,7 +13735,7 @@
                 </a:solidFill>
                 <a:latin typeface="Arial"/>
               </a:rPr>
-              <a:t>When something the AI drafted turns out wrong, it is your name on the decision</a:t>
+              <a:t>Useful then. Necessary now</a:t>
             </a:r>
           </a:p>
         </p:txBody>
@@ -13669,7 +13749,7 @@
         <p:spPr>
           <a:xfrm>
             <a:off x="658368" y="1600200"/>
-            <a:ext cx="10881360" cy="1984248"/>
+            <a:ext cx="10881360" cy="2651760"/>
           </a:xfrm>
           <a:prstGeom prst="rect">
             <a:avLst/>
@@ -13694,7 +13774,7 @@
                 </a:solidFill>
                 <a:latin typeface="Arial"/>
               </a:rPr>
-              <a:t>Across every play the pattern holds: the AI prepares, the human decides. The Board rules on the gate paper. The architect defends the ranking. Counsel approves the terms of reference. The minister owns the roadmap.</a:t>
+              <a:t>In the era of digitising paper, an Enterprise Architecture was useful — a nice-to-have that made things tidier.</a:t>
             </a:r>
           </a:p>
           <a:p>
@@ -13710,7 +13790,7 @@
                 </a:solidFill>
                 <a:latin typeface="Arial"/>
               </a:rPr>
-              <a:t>Accountability cannot be handed to a tool that has no stake in the outcome and cannot be questioned afterward. The answer is never "the AI said so".</a:t>
+              <a:t>In the era of redesigning how government works, it is necessary: without it, re-use does not happen, and the business and IT sides cannot have the conversation the redesign requires.</a:t>
             </a:r>
           </a:p>
         </p:txBody>
@@ -13723,7 +13803,7 @@
         </p:nvSpPr>
         <p:spPr>
           <a:xfrm>
-            <a:off x="658368" y="3767328"/>
+            <a:off x="658368" y="4434840"/>
             <a:ext cx="10881360" cy="1325880"/>
           </a:xfrm>
           <a:prstGeom prst="roundRect">
@@ -13769,7 +13849,7 @@
         </p:nvSpPr>
         <p:spPr>
           <a:xfrm>
-            <a:off x="859536" y="3959352"/>
+            <a:off x="859536" y="4626864"/>
             <a:ext cx="10479024" cy="1051560"/>
           </a:xfrm>
           <a:prstGeom prst="rect">
@@ -13795,7 +13875,7 @@
                 </a:solidFill>
                 <a:latin typeface="Arial"/>
               </a:rPr>
-              <a:t>Use AI to decide faster and better. Never to avoid deciding.</a:t>
+              <a:t>The case is not that an EA would be a good idea. It is that the new work cannot be done well without one.</a:t>
             </a:r>
           </a:p>
         </p:txBody>
@@ -13829,7 +13909,7 @@
                 </a:solidFill>
                 <a:latin typeface="Arial"/>
               </a:rPr>
-              <a:t>5.7 · Keep AI honest — verify, cite, and protect data</a:t>
+              <a:t>5.7 · The closing case — proven, portable, and necessary now</a:t>
             </a:r>
           </a:p>
         </p:txBody>
@@ -13881,7 +13961,7 @@
                 </a:solidFill>
                 <a:latin typeface="Arial"/>
               </a:rPr>
-              <a:t>Verify against a source, cite or discard, never paste confidential data, and keep the decision human — four safeguards that separate AI that helps from AI that quietly harms.</a:t>
+              <a:t>Proven, portable, and necessary now — held together by the two reasons an EA exists: it makes re-use possible, and it gives business and IT a shared language.</a:t>
             </a:r>
           </a:p>
         </p:txBody>
@@ -13949,7 +14029,7 @@
                 </a:solidFill>
                 <a:latin typeface="Arial"/>
               </a:rPr>
-              <a:t>5.7 · Keep AI honest — verify, cite, and protect data</a:t>
+              <a:t>5.7 · The closing case — proven, portable, and necessary now</a:t>
             </a:r>
           </a:p>
         </p:txBody>
@@ -14119,7 +14199,7 @@
                 </a:solidFill>
                 <a:latin typeface="Arial"/>
               </a:rPr>
-              <a:t>•  ITU Knowledge Products contract Terms of Reference — §4.3 (AI integration)</a:t>
+              <a:t>•  PAERA v1.0 — §2.3 (Role of Enterprise Architecture)</a:t>
             </a:r>
           </a:p>
           <a:p>
@@ -14135,7 +14215,7 @@
                 </a:solidFill>
                 <a:latin typeface="Arial"/>
               </a:rPr>
-              <a:t>•  PAERA v1.0 — §3.4.2 (Digital Data)</a:t>
+              <a:t>•  PAERA v1.0 — §2.5 (What is Digital Government?)</a:t>
             </a:r>
           </a:p>
         </p:txBody>
@@ -14203,7 +14283,7 @@
                 </a:solidFill>
                 <a:latin typeface="Arial"/>
               </a:rPr>
-              <a:t>5.7 · Keep AI honest — verify, cite, and protect data</a:t>
+              <a:t>5.7 · The closing case — proven, portable, and necessary now</a:t>
             </a:r>
           </a:p>
         </p:txBody>
